--- a/doc/AXI.pptx
+++ b/doc/AXI.pptx
@@ -5,16 +5,15 @@
     <p:sldMasterId id="2147483648" r:id="rId1"/>
   </p:sldMasterIdLst>
   <p:sldIdLst>
-    <p:sldId id="256" r:id="rId2"/>
-    <p:sldId id="258" r:id="rId3"/>
-    <p:sldId id="259" r:id="rId4"/>
-    <p:sldId id="260" r:id="rId5"/>
-    <p:sldId id="261" r:id="rId6"/>
-    <p:sldId id="262" r:id="rId7"/>
-    <p:sldId id="257" r:id="rId8"/>
-    <p:sldId id="263" r:id="rId9"/>
-    <p:sldId id="264" r:id="rId10"/>
-    <p:sldId id="265" r:id="rId11"/>
+    <p:sldId id="258" r:id="rId2"/>
+    <p:sldId id="259" r:id="rId3"/>
+    <p:sldId id="260" r:id="rId4"/>
+    <p:sldId id="261" r:id="rId5"/>
+    <p:sldId id="262" r:id="rId6"/>
+    <p:sldId id="257" r:id="rId7"/>
+    <p:sldId id="263" r:id="rId8"/>
+    <p:sldId id="264" r:id="rId9"/>
+    <p:sldId id="265" r:id="rId10"/>
   </p:sldIdLst>
   <p:sldSz cx="12192000" cy="6858000"/>
   <p:notesSz cx="6858000" cy="9144000"/>
@@ -268,7 +267,7 @@
           <a:p>
             <a:fld id="{F120C451-DCB1-4D59-8D1B-95032E339999}" type="datetimeFigureOut">
               <a:rPr lang="en-US" smtClean="0"/>
-              <a:t>8/24/2026</a:t>
+              <a:t>9/19/2026</a:t>
             </a:fld>
             <a:endParaRPr lang="en-US"/>
           </a:p>
@@ -466,7 +465,7 @@
           <a:p>
             <a:fld id="{F120C451-DCB1-4D59-8D1B-95032E339999}" type="datetimeFigureOut">
               <a:rPr lang="en-US" smtClean="0"/>
-              <a:t>8/24/2026</a:t>
+              <a:t>9/19/2026</a:t>
             </a:fld>
             <a:endParaRPr lang="en-US"/>
           </a:p>
@@ -674,7 +673,7 @@
           <a:p>
             <a:fld id="{F120C451-DCB1-4D59-8D1B-95032E339999}" type="datetimeFigureOut">
               <a:rPr lang="en-US" smtClean="0"/>
-              <a:t>8/24/2026</a:t>
+              <a:t>9/19/2026</a:t>
             </a:fld>
             <a:endParaRPr lang="en-US"/>
           </a:p>
@@ -872,7 +871,7 @@
           <a:p>
             <a:fld id="{F120C451-DCB1-4D59-8D1B-95032E339999}" type="datetimeFigureOut">
               <a:rPr lang="en-US" smtClean="0"/>
-              <a:t>8/24/2026</a:t>
+              <a:t>9/19/2026</a:t>
             </a:fld>
             <a:endParaRPr lang="en-US"/>
           </a:p>
@@ -1147,7 +1146,7 @@
           <a:p>
             <a:fld id="{F120C451-DCB1-4D59-8D1B-95032E339999}" type="datetimeFigureOut">
               <a:rPr lang="en-US" smtClean="0"/>
-              <a:t>8/24/2026</a:t>
+              <a:t>9/19/2026</a:t>
             </a:fld>
             <a:endParaRPr lang="en-US"/>
           </a:p>
@@ -1412,7 +1411,7 @@
           <a:p>
             <a:fld id="{F120C451-DCB1-4D59-8D1B-95032E339999}" type="datetimeFigureOut">
               <a:rPr lang="en-US" smtClean="0"/>
-              <a:t>8/24/2026</a:t>
+              <a:t>9/19/2026</a:t>
             </a:fld>
             <a:endParaRPr lang="en-US"/>
           </a:p>
@@ -1824,7 +1823,7 @@
           <a:p>
             <a:fld id="{F120C451-DCB1-4D59-8D1B-95032E339999}" type="datetimeFigureOut">
               <a:rPr lang="en-US" smtClean="0"/>
-              <a:t>8/24/2026</a:t>
+              <a:t>9/19/2026</a:t>
             </a:fld>
             <a:endParaRPr lang="en-US"/>
           </a:p>
@@ -1965,7 +1964,7 @@
           <a:p>
             <a:fld id="{F120C451-DCB1-4D59-8D1B-95032E339999}" type="datetimeFigureOut">
               <a:rPr lang="en-US" smtClean="0"/>
-              <a:t>8/24/2026</a:t>
+              <a:t>9/19/2026</a:t>
             </a:fld>
             <a:endParaRPr lang="en-US"/>
           </a:p>
@@ -2078,7 +2077,7 @@
           <a:p>
             <a:fld id="{F120C451-DCB1-4D59-8D1B-95032E339999}" type="datetimeFigureOut">
               <a:rPr lang="en-US" smtClean="0"/>
-              <a:t>8/24/2026</a:t>
+              <a:t>9/19/2026</a:t>
             </a:fld>
             <a:endParaRPr lang="en-US"/>
           </a:p>
@@ -2389,7 +2388,7 @@
           <a:p>
             <a:fld id="{F120C451-DCB1-4D59-8D1B-95032E339999}" type="datetimeFigureOut">
               <a:rPr lang="en-US" smtClean="0"/>
-              <a:t>8/24/2026</a:t>
+              <a:t>9/19/2026</a:t>
             </a:fld>
             <a:endParaRPr lang="en-US"/>
           </a:p>
@@ -2677,7 +2676,7 @@
           <a:p>
             <a:fld id="{F120C451-DCB1-4D59-8D1B-95032E339999}" type="datetimeFigureOut">
               <a:rPr lang="en-US" smtClean="0"/>
-              <a:t>8/24/2026</a:t>
+              <a:t>9/19/2026</a:t>
             </a:fld>
             <a:endParaRPr lang="en-US"/>
           </a:p>
@@ -2918,7 +2917,7 @@
           <a:p>
             <a:fld id="{F120C451-DCB1-4D59-8D1B-95032E339999}" type="datetimeFigureOut">
               <a:rPr lang="en-US" smtClean="0"/>
-              <a:t>8/24/2026</a:t>
+              <a:t>9/19/2026</a:t>
             </a:fld>
             <a:endParaRPr lang="en-US"/>
           </a:p>
@@ -3335,184 +3334,6 @@
           <a:chExt cx="0" cy="0"/>
         </a:xfrm>
       </p:grpSpPr>
-      <p:sp>
-        <p:nvSpPr>
-          <p:cNvPr id="2" name="Title 1">
-            <a:extLst>
-              <a:ext uri="{FF2B5EF4-FFF2-40B4-BE49-F238E27FC236}">
-                <a16:creationId xmlns:a16="http://schemas.microsoft.com/office/drawing/2014/main" id="{BFE50D24-1E3F-ECF2-CDDB-57138DE5B6EE}"/>
-              </a:ext>
-            </a:extLst>
-          </p:cNvPr>
-          <p:cNvSpPr>
-            <a:spLocks noGrp="1"/>
-          </p:cNvSpPr>
-          <p:nvPr>
-            <p:ph type="ctrTitle"/>
-          </p:nvPr>
-        </p:nvSpPr>
-        <p:spPr/>
-        <p:txBody>
-          <a:bodyPr/>
-          <a:lstStyle/>
-          <a:p>
-            <a:endParaRPr lang="en-US"/>
-          </a:p>
-        </p:txBody>
-      </p:sp>
-      <p:sp>
-        <p:nvSpPr>
-          <p:cNvPr id="3" name="Subtitle 2">
-            <a:extLst>
-              <a:ext uri="{FF2B5EF4-FFF2-40B4-BE49-F238E27FC236}">
-                <a16:creationId xmlns:a16="http://schemas.microsoft.com/office/drawing/2014/main" id="{D71A3B45-CEB2-23E6-ACB8-C5F9D5BE2BE9}"/>
-              </a:ext>
-            </a:extLst>
-          </p:cNvPr>
-          <p:cNvSpPr>
-            <a:spLocks noGrp="1"/>
-          </p:cNvSpPr>
-          <p:nvPr>
-            <p:ph type="subTitle" idx="1"/>
-          </p:nvPr>
-        </p:nvSpPr>
-        <p:spPr/>
-        <p:txBody>
-          <a:bodyPr/>
-          <a:lstStyle/>
-          <a:p>
-            <a:endParaRPr lang="en-US"/>
-          </a:p>
-        </p:txBody>
-      </p:sp>
-    </p:spTree>
-    <p:extLst>
-      <p:ext uri="{BB962C8B-B14F-4D97-AF65-F5344CB8AC3E}">
-        <p14:creationId xmlns:p14="http://schemas.microsoft.com/office/powerpoint/2010/main" val="1992602617"/>
-      </p:ext>
-    </p:extLst>
-  </p:cSld>
-  <p:clrMapOvr>
-    <a:masterClrMapping/>
-  </p:clrMapOvr>
-</p:sld>
-</file>
-
-<file path=ppt/slides/slide10.xml><?xml version="1.0" encoding="utf-8"?>
-<p:sld xmlns:a="http://schemas.openxmlformats.org/drawingml/2006/main" xmlns:r="http://schemas.openxmlformats.org/officeDocument/2006/relationships" xmlns:p="http://schemas.openxmlformats.org/presentationml/2006/main">
-  <p:cSld>
-    <p:spTree>
-      <p:nvGrpSpPr>
-        <p:cNvPr id="1" name=""/>
-        <p:cNvGrpSpPr/>
-        <p:nvPr/>
-      </p:nvGrpSpPr>
-      <p:grpSpPr>
-        <a:xfrm>
-          <a:off x="0" y="0"/>
-          <a:ext cx="0" cy="0"/>
-          <a:chOff x="0" y="0"/>
-          <a:chExt cx="0" cy="0"/>
-        </a:xfrm>
-      </p:grpSpPr>
-      <p:sp>
-        <p:nvSpPr>
-          <p:cNvPr id="5" name="TextBox 4">
-            <a:extLst>
-              <a:ext uri="{FF2B5EF4-FFF2-40B4-BE49-F238E27FC236}">
-                <a16:creationId xmlns:a16="http://schemas.microsoft.com/office/drawing/2014/main" id="{1D22FD84-A28B-942F-BDCA-5BCB3A798068}"/>
-              </a:ext>
-            </a:extLst>
-          </p:cNvPr>
-          <p:cNvSpPr txBox="1"/>
-          <p:nvPr/>
-        </p:nvSpPr>
-        <p:spPr>
-          <a:xfrm>
-            <a:off x="3759201" y="231410"/>
-            <a:ext cx="5757333" cy="369332"/>
-          </a:xfrm>
-          <a:prstGeom prst="rect">
-            <a:avLst/>
-          </a:prstGeom>
-          <a:noFill/>
-        </p:spPr>
-        <p:txBody>
-          <a:bodyPr wrap="square" rtlCol="0">
-            <a:spAutoFit/>
-          </a:bodyPr>
-          <a:lstStyle/>
-          <a:p>
-            <a:r>
-              <a:rPr lang="en-US" b="1" dirty="0">
-                <a:latin typeface="Times New Roman" panose="02020603050405020304" pitchFamily="18" charset="0"/>
-                <a:cs typeface="Times New Roman" panose="02020603050405020304" pitchFamily="18" charset="0"/>
-              </a:rPr>
-              <a:t>6 LEN Burst Write in Slave0 from interconnect top</a:t>
-            </a:r>
-          </a:p>
-        </p:txBody>
-      </p:sp>
-      <p:pic>
-        <p:nvPicPr>
-          <p:cNvPr id="11" name="Picture 10">
-            <a:extLst>
-              <a:ext uri="{FF2B5EF4-FFF2-40B4-BE49-F238E27FC236}">
-                <a16:creationId xmlns:a16="http://schemas.microsoft.com/office/drawing/2014/main" id="{A1DD67ED-B421-0BE0-050F-BE9F64859F7F}"/>
-              </a:ext>
-            </a:extLst>
-          </p:cNvPr>
-          <p:cNvPicPr>
-            <a:picLocks noChangeAspect="1"/>
-          </p:cNvPicPr>
-          <p:nvPr/>
-        </p:nvPicPr>
-        <p:blipFill>
-          <a:blip r:embed="rId2"/>
-          <a:stretch>
-            <a:fillRect/>
-          </a:stretch>
-        </p:blipFill>
-        <p:spPr>
-          <a:xfrm>
-            <a:off x="982133" y="660011"/>
-            <a:ext cx="9912163" cy="5897460"/>
-          </a:xfrm>
-          <a:prstGeom prst="rect">
-            <a:avLst/>
-          </a:prstGeom>
-        </p:spPr>
-      </p:pic>
-    </p:spTree>
-    <p:extLst>
-      <p:ext uri="{BB962C8B-B14F-4D97-AF65-F5344CB8AC3E}">
-        <p14:creationId xmlns:p14="http://schemas.microsoft.com/office/powerpoint/2010/main" val="627423921"/>
-      </p:ext>
-    </p:extLst>
-  </p:cSld>
-  <p:clrMapOvr>
-    <a:masterClrMapping/>
-  </p:clrMapOvr>
-</p:sld>
-</file>
-
-<file path=ppt/slides/slide2.xml><?xml version="1.0" encoding="utf-8"?>
-<p:sld xmlns:a="http://schemas.openxmlformats.org/drawingml/2006/main" xmlns:r="http://schemas.openxmlformats.org/officeDocument/2006/relationships" xmlns:p="http://schemas.openxmlformats.org/presentationml/2006/main">
-  <p:cSld>
-    <p:spTree>
-      <p:nvGrpSpPr>
-        <p:cNvPr id="1" name=""/>
-        <p:cNvGrpSpPr/>
-        <p:nvPr/>
-      </p:nvGrpSpPr>
-      <p:grpSpPr>
-        <a:xfrm>
-          <a:off x="0" y="0"/>
-          <a:ext cx="0" cy="0"/>
-          <a:chOff x="0" y="0"/>
-          <a:chExt cx="0" cy="0"/>
-        </a:xfrm>
-      </p:grpSpPr>
       <p:pic>
         <p:nvPicPr>
           <p:cNvPr id="5" name="Picture 4">
@@ -3595,7 +3416,7 @@
 </p:sld>
 </file>
 
-<file path=ppt/slides/slide3.xml><?xml version="1.0" encoding="utf-8"?>
+<file path=ppt/slides/slide2.xml><?xml version="1.0" encoding="utf-8"?>
 <p:sld xmlns:a="http://schemas.openxmlformats.org/drawingml/2006/main" xmlns:r="http://schemas.openxmlformats.org/officeDocument/2006/relationships" xmlns:p="http://schemas.openxmlformats.org/presentationml/2006/main">
   <p:cSld>
     <p:spTree>
@@ -3693,7 +3514,7 @@
 </p:sld>
 </file>
 
-<file path=ppt/slides/slide4.xml><?xml version="1.0" encoding="utf-8"?>
+<file path=ppt/slides/slide3.xml><?xml version="1.0" encoding="utf-8"?>
 <p:sld xmlns:a="http://schemas.openxmlformats.org/drawingml/2006/main" xmlns:r="http://schemas.openxmlformats.org/officeDocument/2006/relationships" xmlns:p="http://schemas.openxmlformats.org/presentationml/2006/main">
   <p:cSld>
     <p:spTree>
@@ -3782,6 +3603,104 @@
     <p:extLst>
       <p:ext uri="{BB962C8B-B14F-4D97-AF65-F5344CB8AC3E}">
         <p14:creationId xmlns:p14="http://schemas.microsoft.com/office/powerpoint/2010/main" val="4186278016"/>
+      </p:ext>
+    </p:extLst>
+  </p:cSld>
+  <p:clrMapOvr>
+    <a:masterClrMapping/>
+  </p:clrMapOvr>
+</p:sld>
+</file>
+
+<file path=ppt/slides/slide4.xml><?xml version="1.0" encoding="utf-8"?>
+<p:sld xmlns:a="http://schemas.openxmlformats.org/drawingml/2006/main" xmlns:r="http://schemas.openxmlformats.org/officeDocument/2006/relationships" xmlns:p="http://schemas.openxmlformats.org/presentationml/2006/main">
+  <p:cSld>
+    <p:spTree>
+      <p:nvGrpSpPr>
+        <p:cNvPr id="1" name=""/>
+        <p:cNvGrpSpPr/>
+        <p:nvPr/>
+      </p:nvGrpSpPr>
+      <p:grpSpPr>
+        <a:xfrm>
+          <a:off x="0" y="0"/>
+          <a:ext cx="0" cy="0"/>
+          <a:chOff x="0" y="0"/>
+          <a:chExt cx="0" cy="0"/>
+        </a:xfrm>
+      </p:grpSpPr>
+      <p:pic>
+        <p:nvPicPr>
+          <p:cNvPr id="3" name="Picture 2">
+            <a:extLst>
+              <a:ext uri="{FF2B5EF4-FFF2-40B4-BE49-F238E27FC236}">
+                <a16:creationId xmlns:a16="http://schemas.microsoft.com/office/drawing/2014/main" id="{DE04FBFB-F07F-58DA-E887-DDFE15A84146}"/>
+              </a:ext>
+            </a:extLst>
+          </p:cNvPr>
+          <p:cNvPicPr>
+            <a:picLocks noChangeAspect="1"/>
+          </p:cNvPicPr>
+          <p:nvPr/>
+        </p:nvPicPr>
+        <p:blipFill>
+          <a:blip r:embed="rId2"/>
+          <a:stretch>
+            <a:fillRect/>
+          </a:stretch>
+        </p:blipFill>
+        <p:spPr>
+          <a:xfrm>
+            <a:off x="1260723" y="922867"/>
+            <a:ext cx="9670553" cy="5484167"/>
+          </a:xfrm>
+          <a:prstGeom prst="rect">
+            <a:avLst/>
+          </a:prstGeom>
+        </p:spPr>
+      </p:pic>
+      <p:sp>
+        <p:nvSpPr>
+          <p:cNvPr id="7" name="TextBox 6">
+            <a:extLst>
+              <a:ext uri="{FF2B5EF4-FFF2-40B4-BE49-F238E27FC236}">
+                <a16:creationId xmlns:a16="http://schemas.microsoft.com/office/drawing/2014/main" id="{7FBDF3FB-EAC6-82F4-AB79-6861878216B3}"/>
+              </a:ext>
+            </a:extLst>
+          </p:cNvPr>
+          <p:cNvSpPr txBox="1"/>
+          <p:nvPr/>
+        </p:nvSpPr>
+        <p:spPr>
+          <a:xfrm>
+            <a:off x="338667" y="237067"/>
+            <a:ext cx="7272866" cy="369332"/>
+          </a:xfrm>
+          <a:prstGeom prst="rect">
+            <a:avLst/>
+          </a:prstGeom>
+          <a:noFill/>
+        </p:spPr>
+        <p:txBody>
+          <a:bodyPr wrap="square" rtlCol="0">
+            <a:spAutoFit/>
+          </a:bodyPr>
+          <a:lstStyle/>
+          <a:p>
+            <a:r>
+              <a:rPr lang="en-US" b="1" dirty="0">
+                <a:latin typeface="Times New Roman" panose="02020603050405020304" pitchFamily="18" charset="0"/>
+                <a:cs typeface="Times New Roman" panose="02020603050405020304" pitchFamily="18" charset="0"/>
+              </a:rPr>
+              <a:t>BRESP = SLVERR for WLAST mismatch</a:t>
+            </a:r>
+          </a:p>
+        </p:txBody>
+      </p:sp>
+    </p:spTree>
+    <p:extLst>
+      <p:ext uri="{BB962C8B-B14F-4D97-AF65-F5344CB8AC3E}">
+        <p14:creationId xmlns:p14="http://schemas.microsoft.com/office/powerpoint/2010/main" val="3190925855"/>
       </p:ext>
     </p:extLst>
   </p:cSld>
@@ -3813,104 +3732,6 @@
           <p:cNvPr id="3" name="Picture 2">
             <a:extLst>
               <a:ext uri="{FF2B5EF4-FFF2-40B4-BE49-F238E27FC236}">
-                <a16:creationId xmlns:a16="http://schemas.microsoft.com/office/drawing/2014/main" id="{DE04FBFB-F07F-58DA-E887-DDFE15A84146}"/>
-              </a:ext>
-            </a:extLst>
-          </p:cNvPr>
-          <p:cNvPicPr>
-            <a:picLocks noChangeAspect="1"/>
-          </p:cNvPicPr>
-          <p:nvPr/>
-        </p:nvPicPr>
-        <p:blipFill>
-          <a:blip r:embed="rId2"/>
-          <a:stretch>
-            <a:fillRect/>
-          </a:stretch>
-        </p:blipFill>
-        <p:spPr>
-          <a:xfrm>
-            <a:off x="1260723" y="922867"/>
-            <a:ext cx="9670553" cy="5484167"/>
-          </a:xfrm>
-          <a:prstGeom prst="rect">
-            <a:avLst/>
-          </a:prstGeom>
-        </p:spPr>
-      </p:pic>
-      <p:sp>
-        <p:nvSpPr>
-          <p:cNvPr id="7" name="TextBox 6">
-            <a:extLst>
-              <a:ext uri="{FF2B5EF4-FFF2-40B4-BE49-F238E27FC236}">
-                <a16:creationId xmlns:a16="http://schemas.microsoft.com/office/drawing/2014/main" id="{7FBDF3FB-EAC6-82F4-AB79-6861878216B3}"/>
-              </a:ext>
-            </a:extLst>
-          </p:cNvPr>
-          <p:cNvSpPr txBox="1"/>
-          <p:nvPr/>
-        </p:nvSpPr>
-        <p:spPr>
-          <a:xfrm>
-            <a:off x="338667" y="237067"/>
-            <a:ext cx="7272866" cy="369332"/>
-          </a:xfrm>
-          <a:prstGeom prst="rect">
-            <a:avLst/>
-          </a:prstGeom>
-          <a:noFill/>
-        </p:spPr>
-        <p:txBody>
-          <a:bodyPr wrap="square" rtlCol="0">
-            <a:spAutoFit/>
-          </a:bodyPr>
-          <a:lstStyle/>
-          <a:p>
-            <a:r>
-              <a:rPr lang="en-US" b="1" dirty="0">
-                <a:latin typeface="Times New Roman" panose="02020603050405020304" pitchFamily="18" charset="0"/>
-                <a:cs typeface="Times New Roman" panose="02020603050405020304" pitchFamily="18" charset="0"/>
-              </a:rPr>
-              <a:t>BRESP = SLVERR for WLAST mismatch</a:t>
-            </a:r>
-          </a:p>
-        </p:txBody>
-      </p:sp>
-    </p:spTree>
-    <p:extLst>
-      <p:ext uri="{BB962C8B-B14F-4D97-AF65-F5344CB8AC3E}">
-        <p14:creationId xmlns:p14="http://schemas.microsoft.com/office/powerpoint/2010/main" val="3190925855"/>
-      </p:ext>
-    </p:extLst>
-  </p:cSld>
-  <p:clrMapOvr>
-    <a:masterClrMapping/>
-  </p:clrMapOvr>
-</p:sld>
-</file>
-
-<file path=ppt/slides/slide6.xml><?xml version="1.0" encoding="utf-8"?>
-<p:sld xmlns:a="http://schemas.openxmlformats.org/drawingml/2006/main" xmlns:r="http://schemas.openxmlformats.org/officeDocument/2006/relationships" xmlns:p="http://schemas.openxmlformats.org/presentationml/2006/main">
-  <p:cSld>
-    <p:spTree>
-      <p:nvGrpSpPr>
-        <p:cNvPr id="1" name=""/>
-        <p:cNvGrpSpPr/>
-        <p:nvPr/>
-      </p:nvGrpSpPr>
-      <p:grpSpPr>
-        <a:xfrm>
-          <a:off x="0" y="0"/>
-          <a:ext cx="0" cy="0"/>
-          <a:chOff x="0" y="0"/>
-          <a:chExt cx="0" cy="0"/>
-        </a:xfrm>
-      </p:grpSpPr>
-      <p:pic>
-        <p:nvPicPr>
-          <p:cNvPr id="3" name="Picture 2">
-            <a:extLst>
-              <a:ext uri="{FF2B5EF4-FFF2-40B4-BE49-F238E27FC236}">
                 <a16:creationId xmlns:a16="http://schemas.microsoft.com/office/drawing/2014/main" id="{C7FB7613-606A-E05B-BCE7-6AB1830B1F31}"/>
               </a:ext>
             </a:extLst>
@@ -3987,7 +3808,7 @@
 </p:sld>
 </file>
 
-<file path=ppt/slides/slide7.xml><?xml version="1.0" encoding="utf-8"?>
+<file path=ppt/slides/slide6.xml><?xml version="1.0" encoding="utf-8"?>
 <p:sld xmlns:a="http://schemas.openxmlformats.org/drawingml/2006/main" xmlns:r="http://schemas.openxmlformats.org/officeDocument/2006/relationships" xmlns:p="http://schemas.openxmlformats.org/presentationml/2006/main">
   <p:cSld>
     <p:spTree>
@@ -4085,7 +3906,7 @@
 </p:sld>
 </file>
 
-<file path=ppt/slides/slide8.xml><?xml version="1.0" encoding="utf-8"?>
+<file path=ppt/slides/slide7.xml><?xml version="1.0" encoding="utf-8"?>
 <p:sld xmlns:a="http://schemas.openxmlformats.org/drawingml/2006/main" xmlns:r="http://schemas.openxmlformats.org/officeDocument/2006/relationships" xmlns:p="http://schemas.openxmlformats.org/presentationml/2006/main">
   <p:cSld>
     <p:spTree>
@@ -4214,7 +4035,7 @@
 </p:sld>
 </file>
 
-<file path=ppt/slides/slide9.xml><?xml version="1.0" encoding="utf-8"?>
+<file path=ppt/slides/slide8.xml><?xml version="1.0" encoding="utf-8"?>
 <p:sld xmlns:a="http://schemas.openxmlformats.org/drawingml/2006/main" xmlns:r="http://schemas.openxmlformats.org/officeDocument/2006/relationships" xmlns:p="http://schemas.openxmlformats.org/presentationml/2006/main">
   <p:cSld>
     <p:spTree>
@@ -4340,6 +4161,104 @@
     <p:extLst>
       <p:ext uri="{BB962C8B-B14F-4D97-AF65-F5344CB8AC3E}">
         <p14:creationId xmlns:p14="http://schemas.microsoft.com/office/powerpoint/2010/main" val="1088384191"/>
+      </p:ext>
+    </p:extLst>
+  </p:cSld>
+  <p:clrMapOvr>
+    <a:masterClrMapping/>
+  </p:clrMapOvr>
+</p:sld>
+</file>
+
+<file path=ppt/slides/slide9.xml><?xml version="1.0" encoding="utf-8"?>
+<p:sld xmlns:a="http://schemas.openxmlformats.org/drawingml/2006/main" xmlns:r="http://schemas.openxmlformats.org/officeDocument/2006/relationships" xmlns:p="http://schemas.openxmlformats.org/presentationml/2006/main">
+  <p:cSld>
+    <p:spTree>
+      <p:nvGrpSpPr>
+        <p:cNvPr id="1" name=""/>
+        <p:cNvGrpSpPr/>
+        <p:nvPr/>
+      </p:nvGrpSpPr>
+      <p:grpSpPr>
+        <a:xfrm>
+          <a:off x="0" y="0"/>
+          <a:ext cx="0" cy="0"/>
+          <a:chOff x="0" y="0"/>
+          <a:chExt cx="0" cy="0"/>
+        </a:xfrm>
+      </p:grpSpPr>
+      <p:sp>
+        <p:nvSpPr>
+          <p:cNvPr id="5" name="TextBox 4">
+            <a:extLst>
+              <a:ext uri="{FF2B5EF4-FFF2-40B4-BE49-F238E27FC236}">
+                <a16:creationId xmlns:a16="http://schemas.microsoft.com/office/drawing/2014/main" id="{1D22FD84-A28B-942F-BDCA-5BCB3A798068}"/>
+              </a:ext>
+            </a:extLst>
+          </p:cNvPr>
+          <p:cNvSpPr txBox="1"/>
+          <p:nvPr/>
+        </p:nvSpPr>
+        <p:spPr>
+          <a:xfrm>
+            <a:off x="3759201" y="231410"/>
+            <a:ext cx="5757333" cy="369332"/>
+          </a:xfrm>
+          <a:prstGeom prst="rect">
+            <a:avLst/>
+          </a:prstGeom>
+          <a:noFill/>
+        </p:spPr>
+        <p:txBody>
+          <a:bodyPr wrap="square" rtlCol="0">
+            <a:spAutoFit/>
+          </a:bodyPr>
+          <a:lstStyle/>
+          <a:p>
+            <a:r>
+              <a:rPr lang="en-US" b="1" dirty="0">
+                <a:latin typeface="Times New Roman" panose="02020603050405020304" pitchFamily="18" charset="0"/>
+                <a:cs typeface="Times New Roman" panose="02020603050405020304" pitchFamily="18" charset="0"/>
+              </a:rPr>
+              <a:t>6 LEN Burst Write in Slave0 from interconnect top</a:t>
+            </a:r>
+          </a:p>
+        </p:txBody>
+      </p:sp>
+      <p:pic>
+        <p:nvPicPr>
+          <p:cNvPr id="11" name="Picture 10">
+            <a:extLst>
+              <a:ext uri="{FF2B5EF4-FFF2-40B4-BE49-F238E27FC236}">
+                <a16:creationId xmlns:a16="http://schemas.microsoft.com/office/drawing/2014/main" id="{A1DD67ED-B421-0BE0-050F-BE9F64859F7F}"/>
+              </a:ext>
+            </a:extLst>
+          </p:cNvPr>
+          <p:cNvPicPr>
+            <a:picLocks noChangeAspect="1"/>
+          </p:cNvPicPr>
+          <p:nvPr/>
+        </p:nvPicPr>
+        <p:blipFill>
+          <a:blip r:embed="rId2"/>
+          <a:stretch>
+            <a:fillRect/>
+          </a:stretch>
+        </p:blipFill>
+        <p:spPr>
+          <a:xfrm>
+            <a:off x="982133" y="660011"/>
+            <a:ext cx="9912163" cy="5897460"/>
+          </a:xfrm>
+          <a:prstGeom prst="rect">
+            <a:avLst/>
+          </a:prstGeom>
+        </p:spPr>
+      </p:pic>
+    </p:spTree>
+    <p:extLst>
+      <p:ext uri="{BB962C8B-B14F-4D97-AF65-F5344CB8AC3E}">
+        <p14:creationId xmlns:p14="http://schemas.microsoft.com/office/powerpoint/2010/main" val="627423921"/>
       </p:ext>
     </p:extLst>
   </p:cSld>
